--- a/doc/Market_Intelligence_Closed_Loop_Roadmap_2.2.19.pptx
+++ b/doc/Market_Intelligence_Closed_Loop_Roadmap_2.2.19.pptx
@@ -206,7 +206,7 @@
           <a:p>
             <a:fld id="{5282F153-3F37-0F45-9E97-73ACFA13230C}" type="datetimeFigureOut">
               <a:rPr lang="en-US"/>
-              <a:t>7/8/26</a:t>
+              <a:t>7/9/26</a:t>
             </a:fld>
             <a:endParaRPr lang="en-US"/>
           </a:p>
@@ -2365,6 +2365,143 @@
               <a:t>1</a:t>
             </a:r>
             <a:endParaRPr lang="en-US" sz="900" dirty="0"/>
+          </a:p>
+        </p:txBody>
+      </p:sp>
+      <p:sp>
+        <p:nvSpPr>
+          <p:cNvPr id="23" name="Text 4">
+            <a:extLst>
+              <a:ext uri="{FF2B5EF4-FFF2-40B4-BE49-F238E27FC236}">
+                <a16:creationId xmlns:a16="http://schemas.microsoft.com/office/drawing/2014/main" id="{F49A4C15-2B4A-E6CE-244E-23A6C078307B}"/>
+              </a:ext>
+            </a:extLst>
+          </p:cNvPr>
+          <p:cNvSpPr/>
+          <p:nvPr/>
+        </p:nvSpPr>
+        <p:spPr>
+          <a:xfrm>
+            <a:off x="566928" y="403860"/>
+            <a:ext cx="5808350" cy="457200"/>
+          </a:xfrm>
+          <a:prstGeom prst="rect">
+            <a:avLst/>
+          </a:prstGeom>
+          <a:noFill/>
+          <a:ln/>
+        </p:spPr>
+        <p:txBody>
+          <a:bodyPr wrap="square" lIns="0" tIns="0" rIns="0" bIns="0" rtlCol="0" anchor="ctr"/>
+          <a:lstStyle/>
+          <a:p>
+            <a:pPr>
+              <a:lnSpc>
+                <a:spcPct val="112000"/>
+              </a:lnSpc>
+            </a:pPr>
+            <a:r>
+              <a:rPr lang="en-US" sz="1600" dirty="0">
+                <a:solidFill>
+                  <a:schemeClr val="bg1"/>
+                </a:solidFill>
+                <a:latin typeface="Calibri" pitchFamily="34" charset="0"/>
+                <a:ea typeface="Calibri" pitchFamily="34" charset="-122"/>
+                <a:cs typeface="Calibri" pitchFamily="34" charset="-120"/>
+              </a:rPr>
+              <a:t>July 8, 2026</a:t>
+            </a:r>
+            <a:r>
+              <a:rPr lang="en-US" dirty="0">
+                <a:solidFill>
+                  <a:schemeClr val="bg1"/>
+                </a:solidFill>
+              </a:rPr>
+              <a:t> • </a:t>
+            </a:r>
+            <a:r>
+              <a:rPr lang="en-US" sz="1600" dirty="0">
+                <a:solidFill>
+                  <a:schemeClr val="bg1"/>
+                </a:solidFill>
+                <a:latin typeface="Calibri" pitchFamily="34" charset="0"/>
+                <a:ea typeface="Calibri" pitchFamily="34" charset="-122"/>
+                <a:cs typeface="Calibri" pitchFamily="34" charset="-120"/>
+              </a:rPr>
+              <a:t>Brandon _ India</a:t>
+            </a:r>
+            <a:r>
+              <a:rPr lang="en-US" dirty="0">
+                <a:solidFill>
+                  <a:schemeClr val="bg1"/>
+                </a:solidFill>
+              </a:rPr>
+              <a:t> • </a:t>
+            </a:r>
+            <a:r>
+              <a:rPr lang="en-US" sz="1600" dirty="0">
+                <a:solidFill>
+                  <a:schemeClr val="bg1"/>
+                </a:solidFill>
+                <a:latin typeface="Calibri" pitchFamily="34" charset="0"/>
+                <a:ea typeface="Calibri" pitchFamily="34" charset="-122"/>
+                <a:cs typeface="Calibri" pitchFamily="34" charset="-120"/>
+              </a:rPr>
+              <a:t> </a:t>
+            </a:r>
+            <a:endParaRPr lang="en-US" sz="1600" dirty="0">
+              <a:solidFill>
+                <a:schemeClr val="bg1"/>
+              </a:solidFill>
+            </a:endParaRPr>
+          </a:p>
+        </p:txBody>
+      </p:sp>
+      <p:sp>
+        <p:nvSpPr>
+          <p:cNvPr id="24" name="TextBox 23">
+            <a:extLst>
+              <a:ext uri="{FF2B5EF4-FFF2-40B4-BE49-F238E27FC236}">
+                <a16:creationId xmlns:a16="http://schemas.microsoft.com/office/drawing/2014/main" id="{2206F056-9461-5C45-8F81-1A3B7327C89A}"/>
+              </a:ext>
+            </a:extLst>
+          </p:cNvPr>
+          <p:cNvSpPr txBox="1"/>
+          <p:nvPr/>
+        </p:nvSpPr>
+        <p:spPr>
+          <a:xfrm>
+            <a:off x="3416808" y="462673"/>
+            <a:ext cx="2958470" cy="333617"/>
+          </a:xfrm>
+          <a:prstGeom prst="rect">
+            <a:avLst/>
+          </a:prstGeom>
+          <a:noFill/>
+        </p:spPr>
+        <p:txBody>
+          <a:bodyPr wrap="square">
+            <a:spAutoFit/>
+          </a:bodyPr>
+          <a:lstStyle/>
+          <a:p>
+            <a:pPr marL="0" indent="0">
+              <a:lnSpc>
+                <a:spcPct val="98000"/>
+              </a:lnSpc>
+              <a:buNone/>
+            </a:pPr>
+            <a:r>
+              <a:rPr lang="en-US" sz="1600" b="1" dirty="0">
+                <a:solidFill>
+                  <a:srgbClr val="FFFFFF"/>
+                </a:solidFill>
+                <a:latin typeface="Cambria" pitchFamily="34" charset="0"/>
+                <a:hlinkClick r:id="rId3"/>
+              </a:rPr>
+              <a:t>accountadmin@majikl.com</a:t>
+            </a:r>
+            <a:endParaRPr lang="en-US" sz="1600" dirty="0"/>
           </a:p>
         </p:txBody>
       </p:sp>

--- a/doc/Market_Intelligence_Closed_Loop_Roadmap_2.2.19.pptx
+++ b/doc/Market_Intelligence_Closed_Loop_Roadmap_2.2.19.pptx
@@ -12375,36 +12375,6 @@
       </p:grpSpPr>
       <p:pic>
         <p:nvPicPr>
-          <p:cNvPr id="5" name="Picture 4">
-            <a:extLst>
-              <a:ext uri="{FF2B5EF4-FFF2-40B4-BE49-F238E27FC236}">
-                <a16:creationId xmlns:a16="http://schemas.microsoft.com/office/drawing/2014/main" id="{338D8027-4ADF-3B55-839D-CA4CC3F2E7E2}"/>
-              </a:ext>
-            </a:extLst>
-          </p:cNvPr>
-          <p:cNvPicPr>
-            <a:picLocks noChangeAspect="1"/>
-          </p:cNvPicPr>
-          <p:nvPr/>
-        </p:nvPicPr>
-        <p:blipFill>
-          <a:blip r:embed="rId2"/>
-          <a:stretch>
-            <a:fillRect/>
-          </a:stretch>
-        </p:blipFill>
-        <p:spPr>
-          <a:xfrm>
-            <a:off x="-1" y="186129"/>
-            <a:ext cx="7069629" cy="4559300"/>
-          </a:xfrm>
-          <a:prstGeom prst="rect">
-            <a:avLst/>
-          </a:prstGeom>
-        </p:spPr>
-      </p:pic>
-      <p:pic>
-        <p:nvPicPr>
           <p:cNvPr id="3" name="Picture 2">
             <a:extLst>
               <a:ext uri="{FF2B5EF4-FFF2-40B4-BE49-F238E27FC236}">
@@ -12418,6 +12388,36 @@
           <p:nvPr/>
         </p:nvPicPr>
         <p:blipFill>
+          <a:blip r:embed="rId2"/>
+          <a:stretch>
+            <a:fillRect/>
+          </a:stretch>
+        </p:blipFill>
+        <p:spPr>
+          <a:xfrm>
+            <a:off x="5113887" y="2008682"/>
+            <a:ext cx="7078113" cy="4849318"/>
+          </a:xfrm>
+          <a:prstGeom prst="rect">
+            <a:avLst/>
+          </a:prstGeom>
+        </p:spPr>
+      </p:pic>
+      <p:pic>
+        <p:nvPicPr>
+          <p:cNvPr id="2" name="Picture 1">
+            <a:extLst>
+              <a:ext uri="{FF2B5EF4-FFF2-40B4-BE49-F238E27FC236}">
+                <a16:creationId xmlns:a16="http://schemas.microsoft.com/office/drawing/2014/main" id="{92769F2E-A048-615B-D4F7-E0FE2B71F05E}"/>
+              </a:ext>
+            </a:extLst>
+          </p:cNvPr>
+          <p:cNvPicPr>
+            <a:picLocks noChangeAspect="1"/>
+          </p:cNvPicPr>
+          <p:nvPr/>
+        </p:nvPicPr>
+        <p:blipFill>
           <a:blip r:embed="rId3"/>
           <a:stretch>
             <a:fillRect/>
@@ -12425,8 +12425,8 @@
         </p:blipFill>
         <p:spPr>
           <a:xfrm>
-            <a:off x="5113887" y="2008682"/>
-            <a:ext cx="7078113" cy="4849318"/>
+            <a:off x="0" y="0"/>
+            <a:ext cx="7772400" cy="3844413"/>
           </a:xfrm>
           <a:prstGeom prst="rect">
             <a:avLst/>
